--- a/catalog/samples/stacked_bar.pptx
+++ b/catalog/samples/stacked_bar.pptx
@@ -1736,7 +1736,7 @@
           </a:p>
           <a:p>
             <a:r>
-              <a:t>  "template_sha256": "113138dc7767fdd49ca06375e65d496efc18596838415744fc1cc86e3881d750"</a:t>
+              <a:t>  "template_sha256": "b7dbf2aa3770dbf861d29191fc3ef8ff7144ab2f2d113f3ca0e856329d622f0c"</a:t>
             </a:r>
           </a:p>
           <a:p>
